--- a/projects/repfr/eps.pptx
+++ b/projects/repfr/eps.pptx
@@ -208,7 +208,7 @@
           <a:p>
             <a:fld id="{0E5916DC-4114-8046-8117-7128A4471AEC}" type="datetimeFigureOut">
               <a:rPr lang="en-US" smtClean="0"/>
-              <a:t>1/1/26</a:t>
+              <a:t>1/21/26</a:t>
             </a:fld>
             <a:endParaRPr lang="en-US"/>
           </a:p>
@@ -695,7 +695,7 @@
           <a:p>
             <a:fld id="{011B30B0-99F5-B94E-85D9-12C5A38C7F15}" type="datetimeFigureOut">
               <a:rPr lang="en-US" smtClean="0"/>
-              <a:t>1/1/26</a:t>
+              <a:t>1/21/26</a:t>
             </a:fld>
             <a:endParaRPr lang="en-US"/>
           </a:p>
@@ -865,7 +865,7 @@
           <a:p>
             <a:fld id="{011B30B0-99F5-B94E-85D9-12C5A38C7F15}" type="datetimeFigureOut">
               <a:rPr lang="en-US" smtClean="0"/>
-              <a:t>1/1/26</a:t>
+              <a:t>1/21/26</a:t>
             </a:fld>
             <a:endParaRPr lang="en-US"/>
           </a:p>
@@ -1045,7 +1045,7 @@
           <a:p>
             <a:fld id="{011B30B0-99F5-B94E-85D9-12C5A38C7F15}" type="datetimeFigureOut">
               <a:rPr lang="en-US" smtClean="0"/>
-              <a:t>1/1/26</a:t>
+              <a:t>1/21/26</a:t>
             </a:fld>
             <a:endParaRPr lang="en-US"/>
           </a:p>
@@ -1215,7 +1215,7 @@
           <a:p>
             <a:fld id="{011B30B0-99F5-B94E-85D9-12C5A38C7F15}" type="datetimeFigureOut">
               <a:rPr lang="en-US" smtClean="0"/>
-              <a:t>1/1/26</a:t>
+              <a:t>1/21/26</a:t>
             </a:fld>
             <a:endParaRPr lang="en-US"/>
           </a:p>
@@ -1461,7 +1461,7 @@
           <a:p>
             <a:fld id="{011B30B0-99F5-B94E-85D9-12C5A38C7F15}" type="datetimeFigureOut">
               <a:rPr lang="en-US" smtClean="0"/>
-              <a:t>1/1/26</a:t>
+              <a:t>1/21/26</a:t>
             </a:fld>
             <a:endParaRPr lang="en-US"/>
           </a:p>
@@ -1693,7 +1693,7 @@
           <a:p>
             <a:fld id="{011B30B0-99F5-B94E-85D9-12C5A38C7F15}" type="datetimeFigureOut">
               <a:rPr lang="en-US" smtClean="0"/>
-              <a:t>1/1/26</a:t>
+              <a:t>1/21/26</a:t>
             </a:fld>
             <a:endParaRPr lang="en-US"/>
           </a:p>
@@ -2060,7 +2060,7 @@
           <a:p>
             <a:fld id="{011B30B0-99F5-B94E-85D9-12C5A38C7F15}" type="datetimeFigureOut">
               <a:rPr lang="en-US" smtClean="0"/>
-              <a:t>1/1/26</a:t>
+              <a:t>1/21/26</a:t>
             </a:fld>
             <a:endParaRPr lang="en-US"/>
           </a:p>
@@ -2178,7 +2178,7 @@
           <a:p>
             <a:fld id="{011B30B0-99F5-B94E-85D9-12C5A38C7F15}" type="datetimeFigureOut">
               <a:rPr lang="en-US" smtClean="0"/>
-              <a:t>1/1/26</a:t>
+              <a:t>1/21/26</a:t>
             </a:fld>
             <a:endParaRPr lang="en-US"/>
           </a:p>
@@ -2273,7 +2273,7 @@
           <a:p>
             <a:fld id="{011B30B0-99F5-B94E-85D9-12C5A38C7F15}" type="datetimeFigureOut">
               <a:rPr lang="en-US" smtClean="0"/>
-              <a:t>1/1/26</a:t>
+              <a:t>1/21/26</a:t>
             </a:fld>
             <a:endParaRPr lang="en-US"/>
           </a:p>
@@ -2550,7 +2550,7 @@
           <a:p>
             <a:fld id="{011B30B0-99F5-B94E-85D9-12C5A38C7F15}" type="datetimeFigureOut">
               <a:rPr lang="en-US" smtClean="0"/>
-              <a:t>1/1/26</a:t>
+              <a:t>1/21/26</a:t>
             </a:fld>
             <a:endParaRPr lang="en-US"/>
           </a:p>
@@ -2807,7 +2807,7 @@
           <a:p>
             <a:fld id="{011B30B0-99F5-B94E-85D9-12C5A38C7F15}" type="datetimeFigureOut">
               <a:rPr lang="en-US" smtClean="0"/>
-              <a:t>1/1/26</a:t>
+              <a:t>1/21/26</a:t>
             </a:fld>
             <a:endParaRPr lang="en-US"/>
           </a:p>
@@ -3020,7 +3020,7 @@
           <a:p>
             <a:fld id="{011B30B0-99F5-B94E-85D9-12C5A38C7F15}" type="datetimeFigureOut">
               <a:rPr lang="en-US" smtClean="0"/>
-              <a:t>1/1/26</a:t>
+              <a:t>1/21/26</a:t>
             </a:fld>
             <a:endParaRPr lang="en-US"/>
           </a:p>
@@ -5643,8 +5643,8 @@
         </p:nvSpPr>
         <p:spPr>
           <a:xfrm>
-            <a:off x="13075824" y="12326900"/>
-            <a:ext cx="6015361" cy="461665"/>
+            <a:off x="11621360" y="12373704"/>
+            <a:ext cx="8198983" cy="461665"/>
           </a:xfrm>
           <a:prstGeom prst="rect">
             <a:avLst/>
@@ -5666,7 +5666,7 @@
               <a:rPr lang="en-US" sz="2400" dirty="0">
                 <a:latin typeface="Helvetica" pitchFamily="2" charset="0"/>
               </a:rPr>
-              <a:t>Retrieval Reinstates a Composite Context</a:t>
+              <a:t>Retrieval Reinstates an Item-Level Composite of Contexts</a:t>
             </a:r>
           </a:p>
         </p:txBody>
@@ -5956,7 +5956,7 @@
         </p:nvSpPr>
         <p:spPr>
           <a:xfrm>
-            <a:off x="23748593" y="8956809"/>
+            <a:off x="23199953" y="9002529"/>
             <a:ext cx="5763012" cy="461665"/>
           </a:xfrm>
           <a:prstGeom prst="rect">
@@ -5970,7 +5970,7 @@
           </a:bodyPr>
           <a:lstStyle/>
           <a:p>
-            <a:pPr>
+            <a:pPr algn="ctr">
               <a:spcAft>
                 <a:spcPts val="1800"/>
               </a:spcAft>
@@ -5979,7 +5979,7 @@
               <a:rPr lang="en-US" sz="2400" dirty="0">
                 <a:latin typeface="Helvetica" pitchFamily="2" charset="0"/>
               </a:rPr>
-              <a:t>No Study-Phase Reinstatement</a:t>
+              <a:t>Restudy Preserves Distinct Contexts</a:t>
             </a:r>
           </a:p>
         </p:txBody>
@@ -6483,8 +6483,8 @@
         </p:nvSpPr>
         <p:spPr>
           <a:xfrm>
-            <a:off x="22856806" y="12332574"/>
-            <a:ext cx="6680199" cy="461665"/>
+            <a:off x="22628206" y="12355435"/>
+            <a:ext cx="6792001" cy="461665"/>
           </a:xfrm>
           <a:prstGeom prst="rect">
             <a:avLst/>
